--- a/VegDrop-Nara-Lokesh-Deck.pptx
+++ b/VegDrop-Nara-Lokesh-Deck.pptx
@@ -118,37 +118,37 @@
   <p:extLst>
     <p:ext uri="{521415D9-36F7-43E2-AB2F-B90AF26B5E84}">
       <p14:sectionLst xmlns:p14="http://schemas.microsoft.com/office/powerpoint/2010/main">
-        <p14:section name="Opening" id="{a3641e02-641f-ffb7-166b-dfe56069d6a9}">
+        <p14:section name="Opening" id="{ed980f60-d9dd-68e1-cd70-c366f1846a5d}">
           <p14:sldIdLst>
             <p14:sldId id="256"/>
           </p14:sldIdLst>
         </p14:section>
-        <p14:section name="The problem" id="{67ec654e-7766-9f6e-6168-3cb776320c7e}">
+        <p14:section name="The problem" id="{806c2425-e900-c2e4-b35f-bc1005c2a3c6}">
           <p14:sldIdLst>
             <p14:sldId id="257"/>
             <p14:sldId id="258"/>
           </p14:sldIdLst>
         </p14:section>
-        <p14:section name="The product" id="{12bec271-9e62-2b25-c126-8b0a8cf9699a}">
+        <p14:section name="The product" id="{85921e75-087b-f2d3-d8d2-3ca202ca0716}">
           <p14:sldIdLst>
             <p14:sldId id="259"/>
             <p14:sldId id="260"/>
             <p14:sldId id="261"/>
           </p14:sldIdLst>
         </p14:section>
-        <p14:section name="Trust and money" id="{fece0819-24ad-102a-5dbc-c994e984f190}">
+        <p14:section name="Trust and money" id="{c30ad79f-7e59-ab21-0c50-c6618540ae10}">
           <p14:sldIdLst>
             <p14:sldId id="262"/>
             <p14:sldId id="263"/>
           </p14:sldIdLst>
         </p14:section>
-        <p14:section name="Impact" id="{257eaca3-6caa-ef3e-84af-66de4681c40e}">
+        <p14:section name="Impact" id="{95167a4b-6791-3f0b-4aba-70f399a3122f}">
           <p14:sldIdLst>
             <p14:sldId id="264"/>
             <p14:sldId id="265"/>
           </p14:sldIdLst>
         </p14:section>
-        <p14:section name="The ask" id="{3988742f-0487-ebe4-c13d-0ef012973a20}">
+        <p14:section name="The ask" id="{368e0b25-d9ed-6a5d-a4cf-389bd93f9438}">
           <p14:sldIdLst>
             <p14:sldId id="266"/>
             <p14:sldId id="267"/>
@@ -3061,8 +3061,8 @@
         </p:nvSpPr>
         <p:spPr>
           <a:xfrm>
-            <a:off x="640080" y="5486400"/>
-            <a:ext cx="7863840" cy="658368"/>
+            <a:off x="640080" y="5358384"/>
+            <a:ext cx="5852160" cy="914400"/>
           </a:xfrm>
           <a:prstGeom prst="rect">
             <a:avLst/>
@@ -3076,7 +3076,7 @@
           <a:p>
             <a:pPr algn="l" indent="0" marL="0">
               <a:lnSpc>
-                <a:spcPct val="120000"/>
+                <a:spcPct val="118000"/>
               </a:lnSpc>
               <a:buNone/>
             </a:pPr>
@@ -3093,7 +3093,7 @@
           <a:p>
             <a:pPr algn="l" indent="0" marL="0">
               <a:lnSpc>
-                <a:spcPct val="120000"/>
+                <a:spcPct val="118000"/>
               </a:lnSpc>
               <a:buNone/>
             </a:pPr>
@@ -3103,10 +3103,27 @@
                   <a:srgbClr val="97BC62"/>
                 </a:solidFill>
               </a:rPr>
-              <a:t>Minister for IT, Electronics, Communications &amp; HRD, Government of Andhra Pradesh</a:t>
+              <a:t>Minister for IT, Electronics, Communications &amp; HRD,</a:t>
             </a:r>
             <a:endParaRPr lang="en-US" sz="1300" dirty="0"/>
           </a:p>
+          <a:p>
+            <a:pPr algn="l" indent="0" marL="0">
+              <a:lnSpc>
+                <a:spcPct val="118000"/>
+              </a:lnSpc>
+              <a:buNone/>
+            </a:pPr>
+            <a:r>
+              <a:rPr lang="en-US" sz="1300" dirty="0">
+                <a:solidFill>
+                  <a:srgbClr val="97BC62"/>
+                </a:solidFill>
+              </a:rPr>
+              <a:t>Government of Andhra Pradesh</a:t>
+            </a:r>
+            <a:endParaRPr lang="en-US" sz="1300" dirty="0"/>
+          </a:p>
         </p:txBody>
       </p:sp>
       <p:sp>
@@ -3117,8 +3134,44 @@
         </p:nvSpPr>
         <p:spPr>
           <a:xfrm>
-            <a:off x="8778240" y="5486400"/>
-            <a:ext cx="2743200" cy="658368"/>
+            <a:off x="7589520" y="5175504"/>
+            <a:ext cx="3931920" cy="219456"/>
+          </a:xfrm>
+          <a:prstGeom prst="rect">
+            <a:avLst/>
+          </a:prstGeom>
+          <a:noFill/>
+          <a:ln/>
+        </p:spPr>
+        <p:txBody>
+          <a:bodyPr wrap="square" lIns="0" tIns="0" rIns="0" bIns="0" rtlCol="0" anchor="ctr"/>
+          <a:lstStyle/>
+          <a:p>
+            <a:pPr algn="r" indent="0" marL="0">
+              <a:buNone/>
+            </a:pPr>
+            <a:r>
+              <a:rPr lang="en-US" sz="900" b="1" spc="200" kern="0" dirty="0">
+                <a:solidFill>
+                  <a:srgbClr val="6E7F6E"/>
+                </a:solidFill>
+              </a:rPr>
+              <a:t>PRESENTED BY</a:t>
+            </a:r>
+            <a:endParaRPr lang="en-US" sz="900" dirty="0"/>
+          </a:p>
+        </p:txBody>
+      </p:sp>
+      <p:sp>
+        <p:nvSpPr>
+          <p:cNvPr id="14" name="Text 12"/>
+          <p:cNvSpPr txBox="1"/>
+          <p:nvPr/>
+        </p:nvSpPr>
+        <p:spPr>
+          <a:xfrm>
+            <a:off x="7589520" y="5394960"/>
+            <a:ext cx="3931920" cy="877824"/>
           </a:xfrm>
           <a:prstGeom prst="rect">
             <a:avLst/>
@@ -3132,7 +3185,7 @@
           <a:p>
             <a:pPr algn="r" indent="0" marL="0">
               <a:lnSpc>
-                <a:spcPct val="120000"/>
+                <a:spcPct val="122000"/>
               </a:lnSpc>
               <a:buNone/>
             </a:pPr>
@@ -3142,24 +3195,125 @@
                   <a:srgbClr val="FFFFFF"/>
                 </a:solidFill>
               </a:rPr>
-              <a:t>[ Your name ]</a:t>
-            </a:r>
-            <a:endParaRPr lang="en-US" sz="1150" dirty="0"/>
-          </a:p>
-          <a:p>
+              <a:t>S. Revanth Gopal</a:t>
+            </a:r>
             <a:pPr algn="r" indent="0" marL="0">
               <a:lnSpc>
-                <a:spcPct val="120000"/>
+                <a:spcPct val="122000"/>
               </a:lnSpc>
               <a:buNone/>
             </a:pPr>
             <a:r>
               <a:rPr lang="en-US" sz="1150" dirty="0">
                 <a:solidFill>
+                  <a:srgbClr val="6E7F6E"/>
+                </a:solidFill>
+              </a:rPr>
+              <a:t>   ·   </a:t>
+            </a:r>
+            <a:pPr algn="r" indent="0" marL="0">
+              <a:lnSpc>
+                <a:spcPct val="122000"/>
+              </a:lnSpc>
+              <a:buNone/>
+            </a:pPr>
+            <a:r>
+              <a:rPr lang="en-US" sz="1150" dirty="0">
+                <a:solidFill>
                   <a:srgbClr val="97BC62"/>
                 </a:solidFill>
               </a:rPr>
-              <a:t>[ phone ]  ·  [ email ]</a:t>
+              <a:t>94414 88911</a:t>
+            </a:r>
+            <a:endParaRPr lang="en-US" sz="1150" dirty="0"/>
+          </a:p>
+          <a:p>
+            <a:pPr algn="r" indent="0" marL="0">
+              <a:lnSpc>
+                <a:spcPct val="122000"/>
+              </a:lnSpc>
+              <a:buNone/>
+            </a:pPr>
+            <a:r>
+              <a:rPr lang="en-US" sz="1150" b="1" dirty="0">
+                <a:solidFill>
+                  <a:srgbClr val="FFFFFF"/>
+                </a:solidFill>
+              </a:rPr>
+              <a:t>Gandra Hemanth Kumar</a:t>
+            </a:r>
+            <a:pPr algn="r" indent="0" marL="0">
+              <a:lnSpc>
+                <a:spcPct val="122000"/>
+              </a:lnSpc>
+              <a:buNone/>
+            </a:pPr>
+            <a:r>
+              <a:rPr lang="en-US" sz="1150" dirty="0">
+                <a:solidFill>
+                  <a:srgbClr val="6E7F6E"/>
+                </a:solidFill>
+              </a:rPr>
+              <a:t>   ·   </a:t>
+            </a:r>
+            <a:pPr algn="r" indent="0" marL="0">
+              <a:lnSpc>
+                <a:spcPct val="122000"/>
+              </a:lnSpc>
+              <a:buNone/>
+            </a:pPr>
+            <a:r>
+              <a:rPr lang="en-US" sz="1150" dirty="0">
+                <a:solidFill>
+                  <a:srgbClr val="97BC62"/>
+                </a:solidFill>
+              </a:rPr>
+              <a:t>97055 41348</a:t>
+            </a:r>
+            <a:endParaRPr lang="en-US" sz="1150" dirty="0"/>
+          </a:p>
+          <a:p>
+            <a:pPr algn="r" indent="0" marL="0">
+              <a:lnSpc>
+                <a:spcPct val="122000"/>
+              </a:lnSpc>
+              <a:buNone/>
+            </a:pPr>
+            <a:r>
+              <a:rPr lang="en-US" sz="1150" b="1" dirty="0">
+                <a:solidFill>
+                  <a:srgbClr val="FFFFFF"/>
+                </a:solidFill>
+              </a:rPr>
+              <a:t>Sangu Sai Bhargav</a:t>
+            </a:r>
+            <a:pPr algn="r" indent="0" marL="0">
+              <a:lnSpc>
+                <a:spcPct val="122000"/>
+              </a:lnSpc>
+              <a:buNone/>
+            </a:pPr>
+            <a:r>
+              <a:rPr lang="en-US" sz="1150" dirty="0">
+                <a:solidFill>
+                  <a:srgbClr val="6E7F6E"/>
+                </a:solidFill>
+              </a:rPr>
+              <a:t>   ·   </a:t>
+            </a:r>
+            <a:pPr algn="r" indent="0" marL="0">
+              <a:lnSpc>
+                <a:spcPct val="122000"/>
+              </a:lnSpc>
+              <a:buNone/>
+            </a:pPr>
+            <a:r>
+              <a:rPr lang="en-US" sz="1150" dirty="0">
+                <a:solidFill>
+                  <a:srgbClr val="97BC62"/>
+                </a:solidFill>
+              </a:rPr>
+              <a:t>90145 51801</a:t>
             </a:r>
             <a:endParaRPr lang="en-US" sz="1150" dirty="0"/>
           </a:p>
@@ -4792,7 +4946,7 @@
         </p:nvSpPr>
         <p:spPr>
           <a:xfrm>
-            <a:off x="640080" y="1225296"/>
+            <a:off x="640080" y="1170432"/>
             <a:ext cx="10881360" cy="292608"/>
           </a:xfrm>
           <a:prstGeom prst="rect">
@@ -4828,12 +4982,12 @@
         </p:nvSpPr>
         <p:spPr>
           <a:xfrm>
-            <a:off x="640080" y="1627632"/>
-            <a:ext cx="10881360" cy="694944"/>
+            <a:off x="640080" y="1554480"/>
+            <a:ext cx="10881360" cy="640080"/>
           </a:xfrm>
           <a:prstGeom prst="roundRect">
             <a:avLst>
-              <a:gd name="adj" fmla="val 5263"/>
+              <a:gd name="adj" fmla="val 5714"/>
             </a:avLst>
           </a:prstGeom>
           <a:solidFill>
@@ -4857,8 +5011,8 @@
         </p:nvSpPr>
         <p:spPr>
           <a:xfrm>
-            <a:off x="969264" y="1627632"/>
-            <a:ext cx="658368" cy="694944"/>
+            <a:off x="969264" y="1554480"/>
+            <a:ext cx="658368" cy="640080"/>
           </a:xfrm>
           <a:prstGeom prst="rect">
             <a:avLst/>
@@ -4893,8 +5047,8 @@
         </p:nvSpPr>
         <p:spPr>
           <a:xfrm>
-            <a:off x="1645920" y="1627632"/>
-            <a:ext cx="4572000" cy="694944"/>
+            <a:off x="1645920" y="1554480"/>
+            <a:ext cx="4572000" cy="640080"/>
           </a:xfrm>
           <a:prstGeom prst="rect">
             <a:avLst/>
@@ -4929,8 +5083,8 @@
         </p:nvSpPr>
         <p:spPr>
           <a:xfrm>
-            <a:off x="6400800" y="1627632"/>
-            <a:ext cx="4754880" cy="694944"/>
+            <a:off x="6400800" y="1554480"/>
+            <a:ext cx="4754880" cy="640080"/>
           </a:xfrm>
           <a:prstGeom prst="rect">
             <a:avLst/>
@@ -4965,12 +5119,12 @@
         </p:nvSpPr>
         <p:spPr>
           <a:xfrm>
-            <a:off x="640080" y="2395728"/>
-            <a:ext cx="10881360" cy="694944"/>
+            <a:off x="640080" y="2267712"/>
+            <a:ext cx="10881360" cy="640080"/>
           </a:xfrm>
           <a:prstGeom prst="roundRect">
             <a:avLst>
-              <a:gd name="adj" fmla="val 5263"/>
+              <a:gd name="adj" fmla="val 5714"/>
             </a:avLst>
           </a:prstGeom>
           <a:solidFill>
@@ -4994,8 +5148,8 @@
         </p:nvSpPr>
         <p:spPr>
           <a:xfrm>
-            <a:off x="969264" y="2395728"/>
-            <a:ext cx="658368" cy="694944"/>
+            <a:off x="969264" y="2267712"/>
+            <a:ext cx="658368" cy="640080"/>
           </a:xfrm>
           <a:prstGeom prst="rect">
             <a:avLst/>
@@ -5030,8 +5184,8 @@
         </p:nvSpPr>
         <p:spPr>
           <a:xfrm>
-            <a:off x="1645920" y="2395728"/>
-            <a:ext cx="4572000" cy="694944"/>
+            <a:off x="1645920" y="2267712"/>
+            <a:ext cx="4572000" cy="640080"/>
           </a:xfrm>
           <a:prstGeom prst="rect">
             <a:avLst/>
@@ -5066,8 +5220,8 @@
         </p:nvSpPr>
         <p:spPr>
           <a:xfrm>
-            <a:off x="6400800" y="2395728"/>
-            <a:ext cx="4754880" cy="694944"/>
+            <a:off x="6400800" y="2267712"/>
+            <a:ext cx="4754880" cy="640080"/>
           </a:xfrm>
           <a:prstGeom prst="rect">
             <a:avLst/>
@@ -5102,12 +5256,12 @@
         </p:nvSpPr>
         <p:spPr>
           <a:xfrm>
-            <a:off x="640080" y="3163824"/>
-            <a:ext cx="10881360" cy="694944"/>
+            <a:off x="640080" y="2980944"/>
+            <a:ext cx="10881360" cy="640080"/>
           </a:xfrm>
           <a:prstGeom prst="roundRect">
             <a:avLst>
-              <a:gd name="adj" fmla="val 5263"/>
+              <a:gd name="adj" fmla="val 5714"/>
             </a:avLst>
           </a:prstGeom>
           <a:solidFill>
@@ -5131,8 +5285,8 @@
         </p:nvSpPr>
         <p:spPr>
           <a:xfrm>
-            <a:off x="969264" y="3163824"/>
-            <a:ext cx="658368" cy="694944"/>
+            <a:off x="969264" y="2980944"/>
+            <a:ext cx="658368" cy="640080"/>
           </a:xfrm>
           <a:prstGeom prst="rect">
             <a:avLst/>
@@ -5167,8 +5321,8 @@
         </p:nvSpPr>
         <p:spPr>
           <a:xfrm>
-            <a:off x="1645920" y="3163824"/>
-            <a:ext cx="4572000" cy="694944"/>
+            <a:off x="1645920" y="2980944"/>
+            <a:ext cx="4572000" cy="640080"/>
           </a:xfrm>
           <a:prstGeom prst="rect">
             <a:avLst/>
@@ -5203,8 +5357,8 @@
         </p:nvSpPr>
         <p:spPr>
           <a:xfrm>
-            <a:off x="6400800" y="3163824"/>
-            <a:ext cx="4754880" cy="694944"/>
+            <a:off x="6400800" y="2980944"/>
+            <a:ext cx="4754880" cy="640080"/>
           </a:xfrm>
           <a:prstGeom prst="rect">
             <a:avLst/>
@@ -5239,12 +5393,12 @@
         </p:nvSpPr>
         <p:spPr>
           <a:xfrm>
-            <a:off x="640080" y="3931920"/>
-            <a:ext cx="10881360" cy="694944"/>
+            <a:off x="640080" y="3694176"/>
+            <a:ext cx="10881360" cy="640080"/>
           </a:xfrm>
           <a:prstGeom prst="roundRect">
             <a:avLst>
-              <a:gd name="adj" fmla="val 5263"/>
+              <a:gd name="adj" fmla="val 5714"/>
             </a:avLst>
           </a:prstGeom>
           <a:solidFill>
@@ -5268,8 +5422,8 @@
         </p:nvSpPr>
         <p:spPr>
           <a:xfrm>
-            <a:off x="969264" y="3931920"/>
-            <a:ext cx="658368" cy="694944"/>
+            <a:off x="969264" y="3694176"/>
+            <a:ext cx="658368" cy="640080"/>
           </a:xfrm>
           <a:prstGeom prst="rect">
             <a:avLst/>
@@ -5304,8 +5458,8 @@
         </p:nvSpPr>
         <p:spPr>
           <a:xfrm>
-            <a:off x="1645920" y="3931920"/>
-            <a:ext cx="4572000" cy="694944"/>
+            <a:off x="1645920" y="3694176"/>
+            <a:ext cx="4572000" cy="640080"/>
           </a:xfrm>
           <a:prstGeom prst="rect">
             <a:avLst/>
@@ -5340,8 +5494,8 @@
         </p:nvSpPr>
         <p:spPr>
           <a:xfrm>
-            <a:off x="6400800" y="3931920"/>
-            <a:ext cx="4754880" cy="694944"/>
+            <a:off x="6400800" y="3694176"/>
+            <a:ext cx="4754880" cy="640080"/>
           </a:xfrm>
           <a:prstGeom prst="rect">
             <a:avLst/>
@@ -5376,12 +5530,12 @@
         </p:nvSpPr>
         <p:spPr>
           <a:xfrm>
-            <a:off x="640080" y="4700016"/>
-            <a:ext cx="10881360" cy="694944"/>
+            <a:off x="640080" y="4407408"/>
+            <a:ext cx="10881360" cy="640080"/>
           </a:xfrm>
           <a:prstGeom prst="roundRect">
             <a:avLst>
-              <a:gd name="adj" fmla="val 5263"/>
+              <a:gd name="adj" fmla="val 5714"/>
             </a:avLst>
           </a:prstGeom>
           <a:solidFill>
@@ -5405,8 +5559,8 @@
         </p:nvSpPr>
         <p:spPr>
           <a:xfrm>
-            <a:off x="969264" y="4700016"/>
-            <a:ext cx="658368" cy="694944"/>
+            <a:off x="969264" y="4407408"/>
+            <a:ext cx="658368" cy="640080"/>
           </a:xfrm>
           <a:prstGeom prst="rect">
             <a:avLst/>
@@ -5441,8 +5595,8 @@
         </p:nvSpPr>
         <p:spPr>
           <a:xfrm>
-            <a:off x="1645920" y="4700016"/>
-            <a:ext cx="4572000" cy="694944"/>
+            <a:off x="1645920" y="4407408"/>
+            <a:ext cx="4572000" cy="640080"/>
           </a:xfrm>
           <a:prstGeom prst="rect">
             <a:avLst/>
@@ -5477,8 +5631,8 @@
         </p:nvSpPr>
         <p:spPr>
           <a:xfrm>
-            <a:off x="6400800" y="4700016"/>
-            <a:ext cx="4754880" cy="694944"/>
+            <a:off x="6400800" y="4407408"/>
+            <a:ext cx="4754880" cy="640080"/>
           </a:xfrm>
           <a:prstGeom prst="rect">
             <a:avLst/>
@@ -5513,12 +5667,12 @@
         </p:nvSpPr>
         <p:spPr>
           <a:xfrm>
-            <a:off x="640080" y="5504688"/>
-            <a:ext cx="10881360" cy="676656"/>
+            <a:off x="640080" y="5303520"/>
+            <a:ext cx="10881360" cy="932688"/>
           </a:xfrm>
           <a:prstGeom prst="roundRect">
             <a:avLst>
-              <a:gd name="adj" fmla="val 5405"/>
+              <a:gd name="adj" fmla="val 3922"/>
             </a:avLst>
           </a:prstGeom>
           <a:solidFill>
@@ -5542,8 +5696,8 @@
         </p:nvSpPr>
         <p:spPr>
           <a:xfrm>
-            <a:off x="1024128" y="5504688"/>
-            <a:ext cx="7680960" cy="676656"/>
+            <a:off x="1024128" y="5394960"/>
+            <a:ext cx="10113264" cy="329184"/>
           </a:xfrm>
           <a:prstGeom prst="rect">
             <a:avLst/>
@@ -5578,8 +5732,8 @@
         </p:nvSpPr>
         <p:spPr>
           <a:xfrm>
-            <a:off x="8503920" y="5504688"/>
-            <a:ext cx="2926080" cy="676656"/>
+            <a:off x="1024128" y="5779008"/>
+            <a:ext cx="10113264" cy="310896"/>
           </a:xfrm>
           <a:prstGeom prst="rect">
             <a:avLst/>
@@ -5591,18 +5745,18 @@
           <a:bodyPr wrap="square" lIns="0" tIns="0" rIns="0" bIns="0" rtlCol="0" anchor="ctr"/>
           <a:lstStyle/>
           <a:p>
-            <a:pPr algn="r" indent="0" marL="0">
-              <a:buNone/>
-            </a:pPr>
-            <a:r>
-              <a:rPr lang="en-US" sz="1150" dirty="0">
+            <a:pPr algn="l" indent="0" marL="0">
+              <a:buNone/>
+            </a:pPr>
+            <a:r>
+              <a:rPr lang="en-US" sz="1100" dirty="0">
                 <a:solidFill>
                   <a:srgbClr val="97BC62"/>
                 </a:solidFill>
               </a:rPr>
-              <a:t>[ Your name ]  ·  [ phone ]  ·  [ email ]</a:t>
-            </a:r>
-            <a:endParaRPr lang="en-US" sz="1150" dirty="0"/>
+              <a:t>S. Revanth Gopal  ·  94414 88911      Gandra Hemanth Kumar  ·  97055 41348      Sangu Sai Bhargav  ·  90145 51801</a:t>
+            </a:r>
+            <a:endParaRPr lang="en-US" sz="1100" dirty="0"/>
           </a:p>
         </p:txBody>
       </p:sp>

--- a/VegDrop-Nara-Lokesh-Deck.pptx
+++ b/VegDrop-Nara-Lokesh-Deck.pptx
@@ -118,37 +118,37 @@
   <p:extLst>
     <p:ext uri="{521415D9-36F7-43E2-AB2F-B90AF26B5E84}">
       <p14:sectionLst xmlns:p14="http://schemas.microsoft.com/office/powerpoint/2010/main">
-        <p14:section name="Opening" id="{ed980f60-d9dd-68e1-cd70-c366f1846a5d}">
+        <p14:section name="Opening" id="{2b317574-ab01-03bf-c9c5-befc7cc9fc59}">
           <p14:sldIdLst>
             <p14:sldId id="256"/>
           </p14:sldIdLst>
         </p14:section>
-        <p14:section name="The problem" id="{806c2425-e900-c2e4-b35f-bc1005c2a3c6}">
+        <p14:section name="The problem" id="{289a6c31-cee0-12dd-15bc-853363f34d26}">
           <p14:sldIdLst>
             <p14:sldId id="257"/>
             <p14:sldId id="258"/>
           </p14:sldIdLst>
         </p14:section>
-        <p14:section name="The product" id="{85921e75-087b-f2d3-d8d2-3ca202ca0716}">
+        <p14:section name="The product" id="{796f4db9-cbe8-fd43-aacf-d53f7097e07d}">
           <p14:sldIdLst>
             <p14:sldId id="259"/>
             <p14:sldId id="260"/>
             <p14:sldId id="261"/>
           </p14:sldIdLst>
         </p14:section>
-        <p14:section name="Trust and money" id="{c30ad79f-7e59-ab21-0c50-c6618540ae10}">
+        <p14:section name="Trust and money" id="{fc5ee1e7-fa4a-d708-898b-dd751bd9c0be}">
           <p14:sldIdLst>
             <p14:sldId id="262"/>
             <p14:sldId id="263"/>
           </p14:sldIdLst>
         </p14:section>
-        <p14:section name="Impact" id="{95167a4b-6791-3f0b-4aba-70f399a3122f}">
+        <p14:section name="Impact" id="{9ee3a6d3-d0a7-ef2e-a805-eb23ef46c8ac}">
           <p14:sldIdLst>
             <p14:sldId id="264"/>
             <p14:sldId id="265"/>
           </p14:sldIdLst>
         </p14:section>
-        <p14:section name="The ask" id="{368e0b25-d9ed-6a5d-a4cf-389bd93f9438}">
+        <p14:section name="The ask" id="{c5b4d5fe-c72b-ce6a-c95f-af673e15c51e}">
           <p14:sldIdLst>
             <p14:sldId id="266"/>
             <p14:sldId id="267"/>
@@ -3195,7 +3195,7 @@
                   <a:srgbClr val="FFFFFF"/>
                 </a:solidFill>
               </a:rPr>
-              <a:t>S. Revanth Gopal</a:t>
+              <a:t>Samileti Revanth Gopal</a:t>
             </a:r>
             <a:pPr algn="r" indent="0" marL="0">
               <a:lnSpc>
@@ -5754,7 +5754,7 @@
                   <a:srgbClr val="97BC62"/>
                 </a:solidFill>
               </a:rPr>
-              <a:t>S. Revanth Gopal  ·  94414 88911      Gandra Hemanth Kumar  ·  97055 41348      Sangu Sai Bhargav  ·  90145 51801</a:t>
+              <a:t>Samileti Revanth Gopal  ·  94414 88911      Gandra Hemanth Kumar  ·  97055 41348      Sangu Sai Bhargav  ·  90145 51801</a:t>
             </a:r>
             <a:endParaRPr lang="en-US" sz="1100" dirty="0"/>
           </a:p>

--- a/VegDrop-Nara-Lokesh-Deck.pptx
+++ b/VegDrop-Nara-Lokesh-Deck.pptx
@@ -118,37 +118,37 @@
   <p:extLst>
     <p:ext uri="{521415D9-36F7-43E2-AB2F-B90AF26B5E84}">
       <p14:sectionLst xmlns:p14="http://schemas.microsoft.com/office/powerpoint/2010/main">
-        <p14:section name="Opening" id="{2b317574-ab01-03bf-c9c5-befc7cc9fc59}">
+        <p14:section name="Opening" id="{f6f7ef20-3925-485c-e535-a88f79fd44ac}">
           <p14:sldIdLst>
             <p14:sldId id="256"/>
           </p14:sldIdLst>
         </p14:section>
-        <p14:section name="The problem" id="{289a6c31-cee0-12dd-15bc-853363f34d26}">
+        <p14:section name="The problem" id="{26626262-8279-bdc7-1967-d9ff175d0a84}">
           <p14:sldIdLst>
             <p14:sldId id="257"/>
             <p14:sldId id="258"/>
           </p14:sldIdLst>
         </p14:section>
-        <p14:section name="The product" id="{796f4db9-cbe8-fd43-aacf-d53f7097e07d}">
+        <p14:section name="The product" id="{cb0fb268-c7eb-938f-cdb5-7fdb99fed153}">
           <p14:sldIdLst>
             <p14:sldId id="259"/>
             <p14:sldId id="260"/>
             <p14:sldId id="261"/>
           </p14:sldIdLst>
         </p14:section>
-        <p14:section name="Trust and money" id="{fc5ee1e7-fa4a-d708-898b-dd751bd9c0be}">
+        <p14:section name="Trust and money" id="{eeb9b4de-799f-f5df-8d8c-220f5a710a8b}">
           <p14:sldIdLst>
             <p14:sldId id="262"/>
             <p14:sldId id="263"/>
           </p14:sldIdLst>
         </p14:section>
-        <p14:section name="Impact" id="{9ee3a6d3-d0a7-ef2e-a805-eb23ef46c8ac}">
+        <p14:section name="Impact" id="{7934e766-92aa-9174-bc10-2cca4e20a2ae}">
           <p14:sldIdLst>
             <p14:sldId id="264"/>
             <p14:sldId id="265"/>
           </p14:sldIdLst>
         </p14:section>
-        <p14:section name="The ask" id="{c5b4d5fe-c72b-ce6a-c95f-af673e15c51e}">
+        <p14:section name="The ask" id="{8ad0c7d5-366d-12e0-8db5-79a6fe0faa16}">
           <p14:sldIdLst>
             <p14:sldId id="266"/>
             <p14:sldId id="267"/>
@@ -161,260 +161,6 @@
     </p:ext>
   </p:extLst>
 </p:presentation>
-</file>
-
-<file path=ppt/charts/chart1.xml><?xml version="1.0" encoding="utf-8"?>
-<c:chartSpace xmlns:c="http://schemas.openxmlformats.org/drawingml/2006/chart" xmlns:a="http://schemas.openxmlformats.org/drawingml/2006/main" xmlns:r="http://schemas.openxmlformats.org/officeDocument/2006/relationships">
-  <c:date1904 val="0"/>
-  <c:roundedCorners val="1"/>
-  <c:chart>
-    <c:autoTitleDeleted val="1"/>
-    <c:plotArea>
-      <c:layout/>
-      <c:barChart>
-        <c:barDir val="bar"/>
-        <c:grouping val="clustered"/>
-        <c:varyColors val="0"/>
-        <c:ser>
-          <c:idx val="0"/>
-          <c:order val="0"/>
-          <c:tx>
-            <c:strRef>
-              <c:f>Sheet1!$B$1</c:f>
-              <c:strCache>
-                <c:ptCount val="1"/>
-                <c:pt idx="0">
-                  <c:v>Share of order value</c:v>
-                </c:pt>
-              </c:strCache>
-            </c:strRef>
-          </c:tx>
-          <c:spPr>
-            <a:solidFill>
-              <a:srgbClr val="2C5F2D"/>
-            </a:solidFill>
-            <a:effectLst/>
-          </c:spPr>
-          <c:invertIfNegative val="0"/>
-          <c:dLbls>
-            <c:numFmt formatCode="0&quot;%&quot;" sourceLinked="0"/>
-            <c:txPr>
-              <a:bodyPr/>
-              <a:lstStyle/>
-              <a:p>
-                <a:pPr>
-                  <a:defRPr b="0" i="0" strike="noStrike" sz="1200" u="none">
-                    <a:solidFill>
-                      <a:srgbClr val="16301A"/>
-                    </a:solidFill>
-                    <a:latin typeface="+mn-lt"/>
-                  </a:defRPr>
-                </a:pPr>
-              </a:p>
-            </c:txPr>
-            <c:showLegendKey val="0"/>
-            <c:showVal val="1"/>
-            <c:showCatName val="0"/>
-            <c:showSerName val="0"/>
-            <c:showPercent val="0"/>
-            <c:showBubbleSize val="0"/>
-            <c:showLeaderLines val="0"/>
-          </c:dLbls>
-          <c:cat>
-            <c:multiLvlStrRef>
-              <c:f>Sheet1!$A$2:$A$6</c:f>
-              <c:multiLvlStrCache>
-                <c:ptCount val="5"/>
-                <c:lvl>
-                  <c:pt idx="0">
-                    <c:v>Stall vendor</c:v>
-                  </c:pt>
-                  <c:pt idx="1">
-                    <c:v>Rider</c:v>
-                  </c:pt>
-                  <c:pt idx="2">
-                    <c:v>Market committee</c:v>
-                  </c:pt>
-                  <c:pt idx="3">
-                    <c:v>Customer incentive</c:v>
-                  </c:pt>
-                  <c:pt idx="4">
-                    <c:v>VegDrop platform</c:v>
-                  </c:pt>
-                </c:lvl>
-              </c:multiLvlStrCache>
-            </c:multiLvlStrRef>
-          </c:cat>
-          <c:val>
-            <c:numRef>
-              <c:f>Sheet1!$B$2:$B$6</c:f>
-              <c:numCache>
-                <c:formatCode>General</c:formatCode>
-                <c:ptCount val="5"/>
-                <c:pt idx="0">
-                  <c:v>85</c:v>
-                </c:pt>
-                <c:pt idx="1">
-                  <c:v>10</c:v>
-                </c:pt>
-                <c:pt idx="2">
-                  <c:v>3</c:v>
-                </c:pt>
-                <c:pt idx="3">
-                  <c:v>2</c:v>
-                </c:pt>
-                <c:pt idx="4">
-                  <c:v>0</c:v>
-                </c:pt>
-              </c:numCache>
-            </c:numRef>
-          </c:val>
-        </c:ser>
-        <c:dLbls>
-          <c:numFmt formatCode="0&quot;%&quot;" sourceLinked="0"/>
-          <c:txPr>
-            <a:bodyPr/>
-            <a:lstStyle/>
-            <a:p>
-              <a:pPr>
-                <a:defRPr b="0" i="0" strike="noStrike" sz="1200" u="none">
-                  <a:solidFill>
-                    <a:srgbClr val="16301A"/>
-                  </a:solidFill>
-                  <a:latin typeface="+mn-lt"/>
-                </a:defRPr>
-              </a:pPr>
-            </a:p>
-          </c:txPr>
-          <c:showLegendKey val="0"/>
-          <c:showVal val="1"/>
-          <c:showCatName val="0"/>
-          <c:showSerName val="0"/>
-          <c:showPercent val="0"/>
-          <c:showBubbleSize val="0"/>
-          <c:showLeaderLines val="0"/>
-        </c:dLbls>
-        <c:gapWidth val="55"/>
-        <c:overlap val="0"/>
-        <c:axId val="2094734554"/>
-        <c:axId val="2094734552"/>
-        <c:axId val="2094734556"/>
-      </c:barChart>
-      <c:catAx>
-        <c:axId val="2094734554"/>
-        <c:scaling>
-          <c:orientation val="minMax"/>
-        </c:scaling>
-        <c:delete val="0"/>
-        <c:axPos val="l"/>
-        <c:numFmt formatCode="General" sourceLinked="1"/>
-        <c:majorTickMark val="out"/>
-        <c:minorTickMark val="none"/>
-        <c:tickLblPos val="nextTo"/>
-        <c:spPr>
-          <a:ln w="12700" cap="flat">
-            <a:solidFill>
-              <a:srgbClr val="888888"/>
-            </a:solidFill>
-            <a:prstDash val="solid"/>
-            <a:round/>
-          </a:ln>
-        </c:spPr>
-        <c:txPr>
-          <a:bodyPr/>
-          <a:lstStyle/>
-          <a:p>
-            <a:pPr>
-              <a:defRPr sz="1200" b="0" i="0" u="none" strike="noStrike">
-                <a:solidFill>
-                  <a:srgbClr val="16301A"/>
-                </a:solidFill>
-                <a:latin typeface="+mn-lt"/>
-              </a:defRPr>
-            </a:pPr>
-            <a:endParaRPr lang="en-US"/>
-          </a:p>
-        </c:txPr>
-        <c:crossAx val="2094734552"/>
-        <c:crosses val="autoZero"/>
-        <c:auto val="1"/>
-        <c:lblAlgn val="ctr"/>
-        <c:noMultiLvlLbl val="1"/>
-      </c:catAx>
-      <c:valAx>
-        <c:axId val="2094734552"/>
-        <c:scaling>
-          <c:orientation val="minMax"/>
-          <c:max val="100"/>
-        </c:scaling>
-        <c:delete val="0"/>
-        <c:axPos val="b"/>
-        <c:majorGridlines>
-          <c:spPr>
-            <a:ln w="9525" cap="flat">
-              <a:solidFill>
-                <a:srgbClr val="E2E8DC"/>
-              </a:solidFill>
-              <a:prstDash val="solid"/>
-              <a:round/>
-            </a:ln>
-          </c:spPr>
-        </c:majorGridlines>
-        <c:numFmt formatCode="General" sourceLinked="0"/>
-        <c:majorTickMark val="out"/>
-        <c:minorTickMark val="none"/>
-        <c:tickLblPos val="low"/>
-        <c:spPr>
-          <a:ln w="12700" cap="flat">
-            <a:solidFill>
-              <a:srgbClr val="888888"/>
-            </a:solidFill>
-            <a:prstDash val="solid"/>
-            <a:round/>
-          </a:ln>
-        </c:spPr>
-        <c:txPr>
-          <a:bodyPr/>
-          <a:lstStyle/>
-          <a:p>
-            <a:pPr>
-              <a:defRPr sz="1000" b="0" i="0" u="none" strike="noStrike">
-                <a:solidFill>
-                  <a:srgbClr val="6E7F6E"/>
-                </a:solidFill>
-                <a:latin typeface="+mn-lt"/>
-              </a:defRPr>
-            </a:pPr>
-            <a:endParaRPr lang="en-US"/>
-          </a:p>
-        </c:txPr>
-        <c:crossAx val="2094734554"/>
-        <c:crosses val="autoZero"/>
-        <c:crossBetween val="between"/>
-        <c:majorUnit val="25"/>
-      </c:valAx>
-      <c:spPr>
-        <a:noFill/>
-        <a:ln>
-          <a:noFill/>
-        </a:ln>
-        <a:effectLst/>
-      </c:spPr>
-    </c:plotArea>
-    <c:plotVisOnly val="1"/>
-    <c:dispBlanksAs val="span"/>
-  </c:chart>
-  <c:spPr>
-    <a:noFill/>
-    <a:ln>
-      <a:noFill/>
-    </a:ln>
-    <a:effectLst/>
-  </c:spPr>
-  <c:externalData r:id="rId1">
-    <c:autoUpdate val="0"/>
-  </c:externalData>
-</c:chartSpace>
 </file>
 
 <file path=ppt/notesMasters/notesMaster1.xml><?xml version="1.0" encoding="utf-8"?>
@@ -12097,31 +11843,609 @@
           </a:p>
         </p:txBody>
       </p:sp>
-      <p:graphicFrame>
-        <p:nvGraphicFramePr>
-          <p:cNvPr id="5" name="share-chart" descr=""/>
-          <p:cNvGraphicFramePr/>
-          <p:nvPr/>
-        </p:nvGraphicFramePr>
-        <p:xfrm>
-          <a:off x="640080" y="1828800"/>
-          <a:ext cx="6492240" cy="3200400"/>
-        </p:xfrm>
-        <a:graphic xmlns:a="http://schemas.openxmlformats.org/drawingml/2006/main">
-          <a:graphicData uri="http://schemas.openxmlformats.org/drawingml/2006/chart">
-            <c:chart xmlns:c="http://schemas.openxmlformats.org/drawingml/2006/chart" r:id="rId1"/>
-          </a:graphicData>
-        </a:graphic>
-      </p:graphicFrame>
-      <p:sp>
-        <p:nvSpPr>
-          <p:cNvPr id="6" name="Text 3"/>
-          <p:cNvSpPr txBox="1"/>
-          <p:nvPr/>
-        </p:nvSpPr>
-        <p:spPr>
-          <a:xfrm>
-            <a:off x="640080" y="5084064"/>
+      <p:sp>
+        <p:nvSpPr>
+          <p:cNvPr id="5" name="Text 3"/>
+          <p:cNvSpPr txBox="1"/>
+          <p:nvPr/>
+        </p:nvSpPr>
+        <p:spPr>
+          <a:xfrm>
+            <a:off x="640080" y="1810512"/>
+            <a:ext cx="6492240" cy="237744"/>
+          </a:xfrm>
+          <a:prstGeom prst="rect">
+            <a:avLst/>
+          </a:prstGeom>
+          <a:noFill/>
+          <a:ln/>
+        </p:spPr>
+        <p:txBody>
+          <a:bodyPr wrap="square" lIns="0" tIns="0" rIns="0" bIns="0" rtlCol="0" anchor="ctr"/>
+          <a:lstStyle/>
+          <a:p>
+            <a:pPr algn="l" indent="0" marL="0">
+              <a:buNone/>
+            </a:pPr>
+            <a:r>
+              <a:rPr lang="en-US" sz="950" b="1" spc="180" kern="0" dirty="0">
+                <a:solidFill>
+                  <a:srgbClr val="6E7F6E"/>
+                </a:solidFill>
+              </a:rPr>
+              <a:t>SHARE OF EACH ORDER'S GROSS</a:t>
+            </a:r>
+            <a:endParaRPr lang="en-US" sz="950" dirty="0"/>
+          </a:p>
+        </p:txBody>
+      </p:sp>
+      <p:sp>
+        <p:nvSpPr>
+          <p:cNvPr id="6" name="Text 4"/>
+          <p:cNvSpPr txBox="1"/>
+          <p:nvPr/>
+        </p:nvSpPr>
+        <p:spPr>
+          <a:xfrm>
+            <a:off x="640080" y="2103120"/>
+            <a:ext cx="1783080" cy="365760"/>
+          </a:xfrm>
+          <a:prstGeom prst="rect">
+            <a:avLst/>
+          </a:prstGeom>
+          <a:noFill/>
+          <a:ln/>
+        </p:spPr>
+        <p:txBody>
+          <a:bodyPr wrap="square" lIns="0" tIns="0" rIns="0" bIns="0" rtlCol="0" anchor="ctr"/>
+          <a:lstStyle/>
+          <a:p>
+            <a:pPr algn="r" indent="0" marL="0">
+              <a:buNone/>
+            </a:pPr>
+            <a:r>
+              <a:rPr lang="en-US" sz="1250" dirty="0">
+                <a:solidFill>
+                  <a:schemeClr val="tx1"/>
+                </a:solidFill>
+              </a:rPr>
+              <a:t>Stall vendor</a:t>
+            </a:r>
+            <a:endParaRPr lang="en-US" sz="1250" dirty="0"/>
+          </a:p>
+        </p:txBody>
+      </p:sp>
+      <p:sp>
+        <p:nvSpPr>
+          <p:cNvPr id="7" name="split-track-1"/>
+          <p:cNvSpPr/>
+          <p:nvPr/>
+        </p:nvSpPr>
+        <p:spPr>
+          <a:xfrm>
+            <a:off x="2560320" y="2167128"/>
+            <a:ext cx="3657600" cy="237744"/>
+          </a:xfrm>
+          <a:prstGeom prst="roundRect">
+            <a:avLst>
+              <a:gd name="adj" fmla="val 192308"/>
+            </a:avLst>
+          </a:prstGeom>
+          <a:solidFill>
+            <a:schemeClr val="bg2"/>
+          </a:solidFill>
+          <a:ln/>
+        </p:spPr>
+      </p:sp>
+      <p:sp>
+        <p:nvSpPr>
+          <p:cNvPr id="8" name="split-bar-1"/>
+          <p:cNvSpPr/>
+          <p:nvPr/>
+        </p:nvSpPr>
+        <p:spPr>
+          <a:xfrm>
+            <a:off x="2560320" y="2167128"/>
+            <a:ext cx="3108960" cy="237744"/>
+          </a:xfrm>
+          <a:prstGeom prst="roundRect">
+            <a:avLst>
+              <a:gd name="adj" fmla="val 192308"/>
+            </a:avLst>
+          </a:prstGeom>
+          <a:solidFill>
+            <a:srgbClr val="2C5F2D"/>
+          </a:solidFill>
+          <a:ln/>
+        </p:spPr>
+      </p:sp>
+      <p:sp>
+        <p:nvSpPr>
+          <p:cNvPr id="9" name="Text 7"/>
+          <p:cNvSpPr txBox="1"/>
+          <p:nvPr/>
+        </p:nvSpPr>
+        <p:spPr>
+          <a:xfrm>
+            <a:off x="6345936" y="2103120"/>
+            <a:ext cx="731520" cy="365760"/>
+          </a:xfrm>
+          <a:prstGeom prst="rect">
+            <a:avLst/>
+          </a:prstGeom>
+          <a:noFill/>
+          <a:ln/>
+        </p:spPr>
+        <p:txBody>
+          <a:bodyPr wrap="square" lIns="0" tIns="0" rIns="0" bIns="0" rtlCol="0" anchor="ctr"/>
+          <a:lstStyle/>
+          <a:p>
+            <a:pPr algn="l" indent="0" marL="0">
+              <a:buNone/>
+            </a:pPr>
+            <a:r>
+              <a:rPr lang="en-US" sz="1300" b="1" dirty="0">
+                <a:solidFill>
+                  <a:srgbClr val="2C5F2D"/>
+                </a:solidFill>
+              </a:rPr>
+              <a:t>85%</a:t>
+            </a:r>
+            <a:endParaRPr lang="en-US" sz="1300" dirty="0"/>
+          </a:p>
+        </p:txBody>
+      </p:sp>
+      <p:sp>
+        <p:nvSpPr>
+          <p:cNvPr id="10" name="Text 8"/>
+          <p:cNvSpPr txBox="1"/>
+          <p:nvPr/>
+        </p:nvSpPr>
+        <p:spPr>
+          <a:xfrm>
+            <a:off x="640080" y="2670048"/>
+            <a:ext cx="1783080" cy="365760"/>
+          </a:xfrm>
+          <a:prstGeom prst="rect">
+            <a:avLst/>
+          </a:prstGeom>
+          <a:noFill/>
+          <a:ln/>
+        </p:spPr>
+        <p:txBody>
+          <a:bodyPr wrap="square" lIns="0" tIns="0" rIns="0" bIns="0" rtlCol="0" anchor="ctr"/>
+          <a:lstStyle/>
+          <a:p>
+            <a:pPr algn="r" indent="0" marL="0">
+              <a:buNone/>
+            </a:pPr>
+            <a:r>
+              <a:rPr lang="en-US" sz="1250" dirty="0">
+                <a:solidFill>
+                  <a:schemeClr val="tx1"/>
+                </a:solidFill>
+              </a:rPr>
+              <a:t>Rider</a:t>
+            </a:r>
+            <a:endParaRPr lang="en-US" sz="1250" dirty="0"/>
+          </a:p>
+        </p:txBody>
+      </p:sp>
+      <p:sp>
+        <p:nvSpPr>
+          <p:cNvPr id="11" name="split-track-2"/>
+          <p:cNvSpPr/>
+          <p:nvPr/>
+        </p:nvSpPr>
+        <p:spPr>
+          <a:xfrm>
+            <a:off x="2560320" y="2734056"/>
+            <a:ext cx="3657600" cy="237744"/>
+          </a:xfrm>
+          <a:prstGeom prst="roundRect">
+            <a:avLst>
+              <a:gd name="adj" fmla="val 192308"/>
+            </a:avLst>
+          </a:prstGeom>
+          <a:solidFill>
+            <a:schemeClr val="bg2"/>
+          </a:solidFill>
+          <a:ln/>
+        </p:spPr>
+      </p:sp>
+      <p:sp>
+        <p:nvSpPr>
+          <p:cNvPr id="12" name="split-bar-2"/>
+          <p:cNvSpPr/>
+          <p:nvPr/>
+        </p:nvSpPr>
+        <p:spPr>
+          <a:xfrm>
+            <a:off x="2560320" y="2734056"/>
+            <a:ext cx="365760" cy="237744"/>
+          </a:xfrm>
+          <a:prstGeom prst="roundRect">
+            <a:avLst>
+              <a:gd name="adj" fmla="val 192308"/>
+            </a:avLst>
+          </a:prstGeom>
+          <a:solidFill>
+            <a:srgbClr val="2C5F2D"/>
+          </a:solidFill>
+          <a:ln/>
+        </p:spPr>
+      </p:sp>
+      <p:sp>
+        <p:nvSpPr>
+          <p:cNvPr id="13" name="Text 11"/>
+          <p:cNvSpPr txBox="1"/>
+          <p:nvPr/>
+        </p:nvSpPr>
+        <p:spPr>
+          <a:xfrm>
+            <a:off x="6345936" y="2670048"/>
+            <a:ext cx="731520" cy="365760"/>
+          </a:xfrm>
+          <a:prstGeom prst="rect">
+            <a:avLst/>
+          </a:prstGeom>
+          <a:noFill/>
+          <a:ln/>
+        </p:spPr>
+        <p:txBody>
+          <a:bodyPr wrap="square" lIns="0" tIns="0" rIns="0" bIns="0" rtlCol="0" anchor="ctr"/>
+          <a:lstStyle/>
+          <a:p>
+            <a:pPr algn="l" indent="0" marL="0">
+              <a:buNone/>
+            </a:pPr>
+            <a:r>
+              <a:rPr lang="en-US" sz="1300" b="1" dirty="0">
+                <a:solidFill>
+                  <a:srgbClr val="2C5F2D"/>
+                </a:solidFill>
+              </a:rPr>
+              <a:t>10%</a:t>
+            </a:r>
+            <a:endParaRPr lang="en-US" sz="1300" dirty="0"/>
+          </a:p>
+        </p:txBody>
+      </p:sp>
+      <p:sp>
+        <p:nvSpPr>
+          <p:cNvPr id="14" name="Text 12"/>
+          <p:cNvSpPr txBox="1"/>
+          <p:nvPr/>
+        </p:nvSpPr>
+        <p:spPr>
+          <a:xfrm>
+            <a:off x="640080" y="3236976"/>
+            <a:ext cx="1783080" cy="365760"/>
+          </a:xfrm>
+          <a:prstGeom prst="rect">
+            <a:avLst/>
+          </a:prstGeom>
+          <a:noFill/>
+          <a:ln/>
+        </p:spPr>
+        <p:txBody>
+          <a:bodyPr wrap="square" lIns="0" tIns="0" rIns="0" bIns="0" rtlCol="0" anchor="ctr"/>
+          <a:lstStyle/>
+          <a:p>
+            <a:pPr algn="r" indent="0" marL="0">
+              <a:buNone/>
+            </a:pPr>
+            <a:r>
+              <a:rPr lang="en-US" sz="1250" dirty="0">
+                <a:solidFill>
+                  <a:schemeClr val="tx1"/>
+                </a:solidFill>
+              </a:rPr>
+              <a:t>Market committee</a:t>
+            </a:r>
+            <a:endParaRPr lang="en-US" sz="1250" dirty="0"/>
+          </a:p>
+        </p:txBody>
+      </p:sp>
+      <p:sp>
+        <p:nvSpPr>
+          <p:cNvPr id="15" name="split-track-3"/>
+          <p:cNvSpPr/>
+          <p:nvPr/>
+        </p:nvSpPr>
+        <p:spPr>
+          <a:xfrm>
+            <a:off x="2560320" y="3300984"/>
+            <a:ext cx="3657600" cy="237744"/>
+          </a:xfrm>
+          <a:prstGeom prst="roundRect">
+            <a:avLst>
+              <a:gd name="adj" fmla="val 192308"/>
+            </a:avLst>
+          </a:prstGeom>
+          <a:solidFill>
+            <a:schemeClr val="bg2"/>
+          </a:solidFill>
+          <a:ln/>
+        </p:spPr>
+      </p:sp>
+      <p:sp>
+        <p:nvSpPr>
+          <p:cNvPr id="16" name="split-bar-3"/>
+          <p:cNvSpPr/>
+          <p:nvPr/>
+        </p:nvSpPr>
+        <p:spPr>
+          <a:xfrm>
+            <a:off x="2560320" y="3300984"/>
+            <a:ext cx="146304" cy="237744"/>
+          </a:xfrm>
+          <a:prstGeom prst="roundRect">
+            <a:avLst>
+              <a:gd name="adj" fmla="val 312500"/>
+            </a:avLst>
+          </a:prstGeom>
+          <a:solidFill>
+            <a:srgbClr val="2C5F2D"/>
+          </a:solidFill>
+          <a:ln/>
+        </p:spPr>
+      </p:sp>
+      <p:sp>
+        <p:nvSpPr>
+          <p:cNvPr id="17" name="Text 15"/>
+          <p:cNvSpPr txBox="1"/>
+          <p:nvPr/>
+        </p:nvSpPr>
+        <p:spPr>
+          <a:xfrm>
+            <a:off x="6345936" y="3236976"/>
+            <a:ext cx="731520" cy="365760"/>
+          </a:xfrm>
+          <a:prstGeom prst="rect">
+            <a:avLst/>
+          </a:prstGeom>
+          <a:noFill/>
+          <a:ln/>
+        </p:spPr>
+        <p:txBody>
+          <a:bodyPr wrap="square" lIns="0" tIns="0" rIns="0" bIns="0" rtlCol="0" anchor="ctr"/>
+          <a:lstStyle/>
+          <a:p>
+            <a:pPr algn="l" indent="0" marL="0">
+              <a:buNone/>
+            </a:pPr>
+            <a:r>
+              <a:rPr lang="en-US" sz="1300" b="1" dirty="0">
+                <a:solidFill>
+                  <a:srgbClr val="2C5F2D"/>
+                </a:solidFill>
+              </a:rPr>
+              <a:t>3%</a:t>
+            </a:r>
+            <a:endParaRPr lang="en-US" sz="1300" dirty="0"/>
+          </a:p>
+        </p:txBody>
+      </p:sp>
+      <p:sp>
+        <p:nvSpPr>
+          <p:cNvPr id="18" name="Text 16"/>
+          <p:cNvSpPr txBox="1"/>
+          <p:nvPr/>
+        </p:nvSpPr>
+        <p:spPr>
+          <a:xfrm>
+            <a:off x="640080" y="3803904"/>
+            <a:ext cx="1783080" cy="365760"/>
+          </a:xfrm>
+          <a:prstGeom prst="rect">
+            <a:avLst/>
+          </a:prstGeom>
+          <a:noFill/>
+          <a:ln/>
+        </p:spPr>
+        <p:txBody>
+          <a:bodyPr wrap="square" lIns="0" tIns="0" rIns="0" bIns="0" rtlCol="0" anchor="ctr"/>
+          <a:lstStyle/>
+          <a:p>
+            <a:pPr algn="r" indent="0" marL="0">
+              <a:buNone/>
+            </a:pPr>
+            <a:r>
+              <a:rPr lang="en-US" sz="1250" dirty="0">
+                <a:solidFill>
+                  <a:schemeClr val="tx1"/>
+                </a:solidFill>
+              </a:rPr>
+              <a:t>Customer incentive</a:t>
+            </a:r>
+            <a:endParaRPr lang="en-US" sz="1250" dirty="0"/>
+          </a:p>
+        </p:txBody>
+      </p:sp>
+      <p:sp>
+        <p:nvSpPr>
+          <p:cNvPr id="19" name="split-track-4"/>
+          <p:cNvSpPr/>
+          <p:nvPr/>
+        </p:nvSpPr>
+        <p:spPr>
+          <a:xfrm>
+            <a:off x="2560320" y="3867912"/>
+            <a:ext cx="3657600" cy="237744"/>
+          </a:xfrm>
+          <a:prstGeom prst="roundRect">
+            <a:avLst>
+              <a:gd name="adj" fmla="val 192308"/>
+            </a:avLst>
+          </a:prstGeom>
+          <a:solidFill>
+            <a:schemeClr val="bg2"/>
+          </a:solidFill>
+          <a:ln/>
+        </p:spPr>
+      </p:sp>
+      <p:sp>
+        <p:nvSpPr>
+          <p:cNvPr id="20" name="split-bar-4"/>
+          <p:cNvSpPr/>
+          <p:nvPr/>
+        </p:nvSpPr>
+        <p:spPr>
+          <a:xfrm>
+            <a:off x="2560320" y="3867912"/>
+            <a:ext cx="146304" cy="237744"/>
+          </a:xfrm>
+          <a:prstGeom prst="roundRect">
+            <a:avLst>
+              <a:gd name="adj" fmla="val 312500"/>
+            </a:avLst>
+          </a:prstGeom>
+          <a:solidFill>
+            <a:srgbClr val="2C5F2D"/>
+          </a:solidFill>
+          <a:ln/>
+        </p:spPr>
+      </p:sp>
+      <p:sp>
+        <p:nvSpPr>
+          <p:cNvPr id="21" name="Text 19"/>
+          <p:cNvSpPr txBox="1"/>
+          <p:nvPr/>
+        </p:nvSpPr>
+        <p:spPr>
+          <a:xfrm>
+            <a:off x="6345936" y="3803904"/>
+            <a:ext cx="731520" cy="365760"/>
+          </a:xfrm>
+          <a:prstGeom prst="rect">
+            <a:avLst/>
+          </a:prstGeom>
+          <a:noFill/>
+          <a:ln/>
+        </p:spPr>
+        <p:txBody>
+          <a:bodyPr wrap="square" lIns="0" tIns="0" rIns="0" bIns="0" rtlCol="0" anchor="ctr"/>
+          <a:lstStyle/>
+          <a:p>
+            <a:pPr algn="l" indent="0" marL="0">
+              <a:buNone/>
+            </a:pPr>
+            <a:r>
+              <a:rPr lang="en-US" sz="1300" b="1" dirty="0">
+                <a:solidFill>
+                  <a:srgbClr val="2C5F2D"/>
+                </a:solidFill>
+              </a:rPr>
+              <a:t>2%</a:t>
+            </a:r>
+            <a:endParaRPr lang="en-US" sz="1300" dirty="0"/>
+          </a:p>
+        </p:txBody>
+      </p:sp>
+      <p:sp>
+        <p:nvSpPr>
+          <p:cNvPr id="22" name="Text 20"/>
+          <p:cNvSpPr txBox="1"/>
+          <p:nvPr/>
+        </p:nvSpPr>
+        <p:spPr>
+          <a:xfrm>
+            <a:off x="640080" y="4370832"/>
+            <a:ext cx="1783080" cy="365760"/>
+          </a:xfrm>
+          <a:prstGeom prst="rect">
+            <a:avLst/>
+          </a:prstGeom>
+          <a:noFill/>
+          <a:ln/>
+        </p:spPr>
+        <p:txBody>
+          <a:bodyPr wrap="square" lIns="0" tIns="0" rIns="0" bIns="0" rtlCol="0" anchor="ctr"/>
+          <a:lstStyle/>
+          <a:p>
+            <a:pPr algn="r" indent="0" marL="0">
+              <a:buNone/>
+            </a:pPr>
+            <a:r>
+              <a:rPr lang="en-US" sz="1250" b="1" dirty="0">
+                <a:solidFill>
+                  <a:srgbClr val="D2601A"/>
+                </a:solidFill>
+              </a:rPr>
+              <a:t>VegDrop platform</a:t>
+            </a:r>
+            <a:endParaRPr lang="en-US" sz="1250" dirty="0"/>
+          </a:p>
+        </p:txBody>
+      </p:sp>
+      <p:sp>
+        <p:nvSpPr>
+          <p:cNvPr id="23" name="split-track-5"/>
+          <p:cNvSpPr/>
+          <p:nvPr/>
+        </p:nvSpPr>
+        <p:spPr>
+          <a:xfrm>
+            <a:off x="2560320" y="4434840"/>
+            <a:ext cx="3657600" cy="237744"/>
+          </a:xfrm>
+          <a:prstGeom prst="roundRect">
+            <a:avLst>
+              <a:gd name="adj" fmla="val 192308"/>
+            </a:avLst>
+          </a:prstGeom>
+          <a:solidFill>
+            <a:schemeClr val="bg2"/>
+          </a:solidFill>
+          <a:ln/>
+        </p:spPr>
+      </p:sp>
+      <p:sp>
+        <p:nvSpPr>
+          <p:cNvPr id="24" name="Text 22"/>
+          <p:cNvSpPr txBox="1"/>
+          <p:nvPr/>
+        </p:nvSpPr>
+        <p:spPr>
+          <a:xfrm>
+            <a:off x="6345936" y="4370832"/>
+            <a:ext cx="731520" cy="365760"/>
+          </a:xfrm>
+          <a:prstGeom prst="rect">
+            <a:avLst/>
+          </a:prstGeom>
+          <a:noFill/>
+          <a:ln/>
+        </p:spPr>
+        <p:txBody>
+          <a:bodyPr wrap="square" lIns="0" tIns="0" rIns="0" bIns="0" rtlCol="0" anchor="ctr"/>
+          <a:lstStyle/>
+          <a:p>
+            <a:pPr algn="l" indent="0" marL="0">
+              <a:buNone/>
+            </a:pPr>
+            <a:r>
+              <a:rPr lang="en-US" sz="1300" b="1" dirty="0">
+                <a:solidFill>
+                  <a:srgbClr val="D2601A"/>
+                </a:solidFill>
+              </a:rPr>
+              <a:t>0%</a:t>
+            </a:r>
+            <a:endParaRPr lang="en-US" sz="1300" dirty="0"/>
+          </a:p>
+        </p:txBody>
+      </p:sp>
+      <p:sp>
+        <p:nvSpPr>
+          <p:cNvPr id="25" name="Text 23"/>
+          <p:cNvSpPr txBox="1"/>
+          <p:nvPr/>
+        </p:nvSpPr>
+        <p:spPr>
+          <a:xfrm>
+            <a:off x="640080" y="4919472"/>
             <a:ext cx="6492240" cy="274320"/>
           </a:xfrm>
           <a:prstGeom prst="rect">
@@ -12151,13 +12475,13 @@
       </p:sp>
       <p:sp>
         <p:nvSpPr>
-          <p:cNvPr id="7" name="Text 4"/>
-          <p:cNvSpPr txBox="1"/>
-          <p:nvPr/>
-        </p:nvSpPr>
-        <p:spPr>
-          <a:xfrm>
-            <a:off x="640080" y="5449824"/>
+          <p:cNvPr id="26" name="Text 24"/>
+          <p:cNvSpPr txBox="1"/>
+          <p:nvPr/>
+        </p:nvSpPr>
+        <p:spPr>
+          <a:xfrm>
+            <a:off x="640080" y="5285232"/>
             <a:ext cx="6492240" cy="566928"/>
           </a:xfrm>
           <a:prstGeom prst="rect">
@@ -12187,7 +12511,7 @@
       </p:sp>
       <p:sp>
         <p:nvSpPr>
-          <p:cNvPr id="8" name="zero-card"/>
+          <p:cNvPr id="27" name="zero-card"/>
           <p:cNvSpPr/>
           <p:nvPr/>
         </p:nvSpPr>
@@ -12216,7 +12540,7 @@
       </p:sp>
       <p:sp>
         <p:nvSpPr>
-          <p:cNvPr id="9" name="Text 6"/>
+          <p:cNvPr id="28" name="Text 26"/>
           <p:cNvSpPr txBox="1"/>
           <p:nvPr/>
         </p:nvSpPr>
@@ -12252,7 +12576,7 @@
       </p:sp>
       <p:sp>
         <p:nvSpPr>
-          <p:cNvPr id="10" name="Text 7"/>
+          <p:cNvPr id="29" name="Text 27"/>
           <p:cNvSpPr txBox="1"/>
           <p:nvPr/>
         </p:nvSpPr>
@@ -12288,7 +12612,7 @@
       </p:sp>
       <p:sp>
         <p:nvSpPr>
-          <p:cNvPr id="11" name="gov-terms-card"/>
+          <p:cNvPr id="30" name="gov-terms-card"/>
           <p:cNvSpPr/>
           <p:nvPr/>
         </p:nvSpPr>
@@ -12322,7 +12646,7 @@
       </p:sp>
       <p:sp>
         <p:nvSpPr>
-          <p:cNvPr id="12" name="Text 9"/>
+          <p:cNvPr id="31" name="Text 29"/>
           <p:cNvSpPr txBox="1"/>
           <p:nvPr/>
         </p:nvSpPr>
@@ -12358,7 +12682,7 @@
       </p:sp>
       <p:sp>
         <p:nvSpPr>
-          <p:cNvPr id="13" name="Text 10"/>
+          <p:cNvPr id="32" name="Text 30"/>
           <p:cNvSpPr txBox="1"/>
           <p:nvPr/>
         </p:nvSpPr>

--- a/VegDrop-Nara-Lokesh-Deck.pptx
+++ b/VegDrop-Nara-Lokesh-Deck.pptx
@@ -4,6 +4,9 @@
   <p:sldMasterIdLst>
     <p:sldMasterId id="2147483648" r:id="rId1"/>
   </p:sldMasterIdLst>
+  <p:notesMasterIdLst>
+    <p:notesMasterId r:id="rId14"/>
+  </p:notesMasterIdLst>
   <p:sldIdLst>
     <p:sldId id="256" r:id="rId2"/>
     <p:sldId id="257" r:id="rId3"/>
@@ -18,9 +21,6 @@
     <p:sldId id="266" r:id="rId12"/>
     <p:sldId id="267" r:id="rId13"/>
   </p:sldIdLst>
-  <p:notesMasterIdLst>
-    <p:notesMasterId r:id="rId14"/>
-  </p:notesMasterIdLst>
   <p:sldSz cx="12192000" cy="6858000"/>
   <p:notesSz cx="6858000" cy="12192000"/>
   <p:defaultTextStyle>
@@ -118,37 +118,37 @@
   <p:extLst>
     <p:ext uri="{521415D9-36F7-43E2-AB2F-B90AF26B5E84}">
       <p14:sectionLst xmlns:p14="http://schemas.microsoft.com/office/powerpoint/2010/main">
-        <p14:section name="Opening" id="{f6f7ef20-3925-485c-e535-a88f79fd44ac}">
+        <p14:section name="Opening" id="{b43f7cd1-c9e1-a83d-57fe-73f4f6bc543a}">
           <p14:sldIdLst>
             <p14:sldId id="256"/>
           </p14:sldIdLst>
         </p14:section>
-        <p14:section name="The problem" id="{26626262-8279-bdc7-1967-d9ff175d0a84}">
+        <p14:section name="The problem" id="{c205baa4-163f-c7bc-995d-21df3874bcb0}">
           <p14:sldIdLst>
             <p14:sldId id="257"/>
             <p14:sldId id="258"/>
           </p14:sldIdLst>
         </p14:section>
-        <p14:section name="The product" id="{cb0fb268-c7eb-938f-cdb5-7fdb99fed153}">
+        <p14:section name="The product" id="{4f06597b-3c2c-a65a-4b55-464629eac768}">
           <p14:sldIdLst>
             <p14:sldId id="259"/>
             <p14:sldId id="260"/>
             <p14:sldId id="261"/>
           </p14:sldIdLst>
         </p14:section>
-        <p14:section name="Trust and money" id="{eeb9b4de-799f-f5df-8d8c-220f5a710a8b}">
+        <p14:section name="Trust and money" id="{467753a6-a3e2-bc57-9041-108e716c6b26}">
           <p14:sldIdLst>
             <p14:sldId id="262"/>
             <p14:sldId id="263"/>
           </p14:sldIdLst>
         </p14:section>
-        <p14:section name="Impact" id="{7934e766-92aa-9174-bc10-2cca4e20a2ae}">
+        <p14:section name="Impact" id="{704757b2-e4f5-78c1-d5c5-e3711184b842}">
           <p14:sldIdLst>
             <p14:sldId id="264"/>
             <p14:sldId id="265"/>
           </p14:sldIdLst>
         </p14:section>
-        <p14:section name="The ask" id="{8ad0c7d5-366d-12e0-8db5-79a6fe0faa16}">
+        <p14:section name="The ask" id="{717249ae-3d26-97c9-fe6c-8b04667c5da7}">
           <p14:sldIdLst>
             <p14:sldId id="266"/>
             <p14:sldId id="267"/>
@@ -13996,4 +13996,299 @@
     </a:ext>
   </a:extLst>
 </a:theme>
+</file>
+
+<file path=ppt/theme/theme2.xml><?xml version="1.0" encoding="utf-8"?>
+<a:theme xmlns:a="http://schemas.openxmlformats.org/drawingml/2006/main" name="VegDrop Rythu Bazaar">
+  <a:themeElements>
+    <a:clrScheme name="VegDrop Rythu Bazaar">
+      <a:dk1>
+        <a:srgbClr val="16301A"/>
+      </a:dk1>
+      <a:lt1>
+        <a:srgbClr val="FFFFFF"/>
+      </a:lt1>
+      <a:dk2>
+        <a:srgbClr val="173B1B"/>
+      </a:dk2>
+      <a:lt2>
+        <a:srgbClr val="EDF2E6"/>
+      </a:lt2>
+      <a:accent1>
+        <a:srgbClr val="2C5F2D"/>
+      </a:accent1>
+      <a:accent2>
+        <a:srgbClr val="97BC62"/>
+      </a:accent2>
+      <a:accent3>
+        <a:srgbClr val="D2601A"/>
+      </a:accent3>
+      <a:accent4>
+        <a:srgbClr val="4E7A68"/>
+      </a:accent4>
+      <a:accent5>
+        <a:srgbClr val="B8860B"/>
+      </a:accent5>
+      <a:accent6>
+        <a:srgbClr val="6E7F6E"/>
+      </a:accent6>
+      <a:hlink>
+        <a:srgbClr val="2C5F2D"/>
+      </a:hlink>
+      <a:folHlink>
+        <a:srgbClr val="6E7F6E"/>
+      </a:folHlink>
+    </a:clrScheme>
+    <a:fontScheme name="VegDrop Rythu Bazaar">
+      <a:majorFont>
+        <a:latin typeface="Cambria"/>
+        <a:ea typeface=""/>
+        <a:cs typeface=""/>
+        <a:font script="Jpan" typeface="游ゴシック Light"/>
+        <a:font script="Hang" typeface="맑은 고딕"/>
+        <a:font script="Hans" typeface="等线 Light"/>
+        <a:font script="Hant" typeface="新細明體"/>
+        <a:font script="Arab" typeface="Times New Roman"/>
+        <a:font script="Hebr" typeface="Times New Roman"/>
+        <a:font script="Thai" typeface="Angsana New"/>
+        <a:font script="Ethi" typeface="Nyala"/>
+        <a:font script="Beng" typeface="Vrinda"/>
+        <a:font script="Gujr" typeface="Shruti"/>
+        <a:font script="Khmr" typeface="MoolBoran"/>
+        <a:font script="Knda" typeface="Tunga"/>
+        <a:font script="Guru" typeface="Raavi"/>
+        <a:font script="Cans" typeface="Euphemia"/>
+        <a:font script="Cher" typeface="Plantagenet Cherokee"/>
+        <a:font script="Yiii" typeface="Microsoft Yi Baiti"/>
+        <a:font script="Tibt" typeface="Microsoft Himalaya"/>
+        <a:font script="Thaa" typeface="MV Boli"/>
+        <a:font script="Deva" typeface="Mangal"/>
+        <a:font script="Telu" typeface="Gautami"/>
+        <a:font script="Taml" typeface="Latha"/>
+        <a:font script="Syrc" typeface="Estrangelo Edessa"/>
+        <a:font script="Orya" typeface="Kalinga"/>
+        <a:font script="Mlym" typeface="Kartika"/>
+        <a:font script="Laoo" typeface="DokChampa"/>
+        <a:font script="Sinh" typeface="Iskoola Pota"/>
+        <a:font script="Mong" typeface="Mongolian Baiti"/>
+        <a:font script="Viet" typeface="Times New Roman"/>
+        <a:font script="Uigh" typeface="Microsoft Uighur"/>
+        <a:font script="Geor" typeface="Sylfaen"/>
+        <a:font script="Armn" typeface="Arial"/>
+        <a:font script="Bugi" typeface="Leelawadee UI"/>
+        <a:font script="Bopo" typeface="Microsoft JhengHei"/>
+        <a:font script="Java" typeface="Javanese Text"/>
+        <a:font script="Lisu" typeface="Segoe UI"/>
+        <a:font script="Mymr" typeface="Myanmar Text"/>
+        <a:font script="Nkoo" typeface="Ebrima"/>
+        <a:font script="Olck" typeface="Nirmala UI"/>
+        <a:font script="Osma" typeface="Ebrima"/>
+        <a:font script="Phag" typeface="Phagspa"/>
+        <a:font script="Syrn" typeface="Estrangelo Edessa"/>
+        <a:font script="Syrj" typeface="Estrangelo Edessa"/>
+        <a:font script="Syre" typeface="Estrangelo Edessa"/>
+        <a:font script="Sora" typeface="Nirmala UI"/>
+        <a:font script="Tale" typeface="Microsoft Tai Le"/>
+        <a:font script="Talu" typeface="Microsoft New Tai Lue"/>
+        <a:font script="Tfng" typeface="Ebrima"/>
+      </a:majorFont>
+      <a:minorFont>
+        <a:latin typeface="Calibri"/>
+        <a:ea typeface=""/>
+        <a:cs typeface=""/>
+        <a:font script="Jpan" typeface="游ゴシック"/>
+        <a:font script="Hang" typeface="맑은 고딕"/>
+        <a:font script="Hans" typeface="等线"/>
+        <a:font script="Hant" typeface="新細明體"/>
+        <a:font script="Arab" typeface="Arial"/>
+        <a:font script="Hebr" typeface="Arial"/>
+        <a:font script="Thai" typeface="Cordia New"/>
+        <a:font script="Ethi" typeface="Nyala"/>
+        <a:font script="Beng" typeface="Vrinda"/>
+        <a:font script="Gujr" typeface="Shruti"/>
+        <a:font script="Khmr" typeface="DaunPenh"/>
+        <a:font script="Knda" typeface="Tunga"/>
+        <a:font script="Guru" typeface="Raavi"/>
+        <a:font script="Cans" typeface="Euphemia"/>
+        <a:font script="Cher" typeface="Plantagenet Cherokee"/>
+        <a:font script="Yiii" typeface="Microsoft Yi Baiti"/>
+        <a:font script="Tibt" typeface="Microsoft Himalaya"/>
+        <a:font script="Thaa" typeface="MV Boli"/>
+        <a:font script="Deva" typeface="Mangal"/>
+        <a:font script="Telu" typeface="Gautami"/>
+        <a:font script="Taml" typeface="Latha"/>
+        <a:font script="Syrc" typeface="Estrangelo Edessa"/>
+        <a:font script="Orya" typeface="Kalinga"/>
+        <a:font script="Mlym" typeface="Kartika"/>
+        <a:font script="Laoo" typeface="DokChampa"/>
+        <a:font script="Sinh" typeface="Iskoola Pota"/>
+        <a:font script="Mong" typeface="Mongolian Baiti"/>
+        <a:font script="Viet" typeface="Arial"/>
+        <a:font script="Uigh" typeface="Microsoft Uighur"/>
+        <a:font script="Geor" typeface="Sylfaen"/>
+        <a:font script="Armn" typeface="Arial"/>
+        <a:font script="Bugi" typeface="Leelawadee UI"/>
+        <a:font script="Bopo" typeface="Microsoft JhengHei"/>
+        <a:font script="Java" typeface="Javanese Text"/>
+        <a:font script="Lisu" typeface="Segoe UI"/>
+        <a:font script="Mymr" typeface="Myanmar Text"/>
+        <a:font script="Nkoo" typeface="Ebrima"/>
+        <a:font script="Olck" typeface="Nirmala UI"/>
+        <a:font script="Osma" typeface="Ebrima"/>
+        <a:font script="Phag" typeface="Phagspa"/>
+        <a:font script="Syrn" typeface="Estrangelo Edessa"/>
+        <a:font script="Syrj" typeface="Estrangelo Edessa"/>
+        <a:font script="Syre" typeface="Estrangelo Edessa"/>
+        <a:font script="Sora" typeface="Nirmala UI"/>
+        <a:font script="Tale" typeface="Microsoft Tai Le"/>
+        <a:font script="Talu" typeface="Microsoft New Tai Lue"/>
+        <a:font script="Tfng" typeface="Ebrima"/>
+      </a:minorFont>
+    </a:fontScheme>
+    <a:fmtScheme name="Office">
+      <a:fillStyleLst>
+        <a:solidFill>
+          <a:schemeClr val="phClr"/>
+        </a:solidFill>
+        <a:gradFill rotWithShape="1">
+          <a:gsLst>
+            <a:gs pos="0">
+              <a:schemeClr val="phClr">
+                <a:lumMod val="110000"/>
+                <a:satMod val="105000"/>
+                <a:tint val="67000"/>
+              </a:schemeClr>
+            </a:gs>
+            <a:gs pos="50000">
+              <a:schemeClr val="phClr">
+                <a:lumMod val="105000"/>
+                <a:satMod val="103000"/>
+                <a:tint val="73000"/>
+              </a:schemeClr>
+            </a:gs>
+            <a:gs pos="100000">
+              <a:schemeClr val="phClr">
+                <a:lumMod val="105000"/>
+                <a:satMod val="109000"/>
+                <a:tint val="81000"/>
+              </a:schemeClr>
+            </a:gs>
+          </a:gsLst>
+          <a:lin ang="5400000" scaled="0"/>
+        </a:gradFill>
+        <a:gradFill rotWithShape="1">
+          <a:gsLst>
+            <a:gs pos="0">
+              <a:schemeClr val="phClr">
+                <a:satMod val="103000"/>
+                <a:lumMod val="102000"/>
+                <a:tint val="94000"/>
+              </a:schemeClr>
+            </a:gs>
+            <a:gs pos="50000">
+              <a:schemeClr val="phClr">
+                <a:satMod val="110000"/>
+                <a:lumMod val="100000"/>
+                <a:shade val="100000"/>
+              </a:schemeClr>
+            </a:gs>
+            <a:gs pos="100000">
+              <a:schemeClr val="phClr">
+                <a:lumMod val="99000"/>
+                <a:satMod val="120000"/>
+                <a:shade val="78000"/>
+              </a:schemeClr>
+            </a:gs>
+          </a:gsLst>
+          <a:lin ang="5400000" scaled="0"/>
+        </a:gradFill>
+      </a:fillStyleLst>
+      <a:lnStyleLst>
+        <a:ln w="6350" cap="flat" cmpd="sng" algn="ctr">
+          <a:solidFill>
+            <a:schemeClr val="phClr"/>
+          </a:solidFill>
+          <a:prstDash val="solid"/>
+          <a:miter lim="800000"/>
+        </a:ln>
+        <a:ln w="12700" cap="flat" cmpd="sng" algn="ctr">
+          <a:solidFill>
+            <a:schemeClr val="phClr"/>
+          </a:solidFill>
+          <a:prstDash val="solid"/>
+          <a:miter lim="800000"/>
+        </a:ln>
+        <a:ln w="19050" cap="flat" cmpd="sng" algn="ctr">
+          <a:solidFill>
+            <a:schemeClr val="phClr"/>
+          </a:solidFill>
+          <a:prstDash val="solid"/>
+          <a:miter lim="800000"/>
+        </a:ln>
+      </a:lnStyleLst>
+      <a:effectStyleLst>
+        <a:effectStyle>
+          <a:effectLst/>
+        </a:effectStyle>
+        <a:effectStyle>
+          <a:effectLst/>
+        </a:effectStyle>
+        <a:effectStyle>
+          <a:effectLst>
+            <a:outerShdw blurRad="57150" dist="19050" dir="5400000" algn="ctr" rotWithShape="0">
+              <a:srgbClr val="000000">
+                <a:alpha val="63000"/>
+              </a:srgbClr>
+            </a:outerShdw>
+          </a:effectLst>
+        </a:effectStyle>
+      </a:effectStyleLst>
+      <a:bgFillStyleLst>
+        <a:solidFill>
+          <a:schemeClr val="phClr"/>
+        </a:solidFill>
+        <a:solidFill>
+          <a:schemeClr val="phClr">
+            <a:tint val="95000"/>
+            <a:satMod val="170000"/>
+          </a:schemeClr>
+        </a:solidFill>
+        <a:gradFill rotWithShape="1">
+          <a:gsLst>
+            <a:gs pos="0">
+              <a:schemeClr val="phClr">
+                <a:tint val="93000"/>
+                <a:satMod val="150000"/>
+                <a:shade val="98000"/>
+                <a:lumMod val="102000"/>
+              </a:schemeClr>
+            </a:gs>
+            <a:gs pos="50000">
+              <a:schemeClr val="phClr">
+                <a:tint val="98000"/>
+                <a:satMod val="130000"/>
+                <a:shade val="90000"/>
+                <a:lumMod val="103000"/>
+              </a:schemeClr>
+            </a:gs>
+            <a:gs pos="100000">
+              <a:schemeClr val="phClr">
+                <a:shade val="63000"/>
+                <a:satMod val="120000"/>
+              </a:schemeClr>
+            </a:gs>
+          </a:gsLst>
+          <a:lin ang="5400000" scaled="0"/>
+        </a:gradFill>
+      </a:bgFillStyleLst>
+    </a:fmtScheme>
+  </a:themeElements>
+  <a:objectDefaults/>
+  <a:extraClrSchemeLst/>
+  <a:extLst>
+    <a:ext uri="{05A4C25C-085E-4340-85A3-A5531E510DB2}">
+      <thm15:themeFamily xmlns:thm15="http://schemas.microsoft.com/office/thememl/2012/main" name="Office Theme" id="{62F939B6-93AF-4DB8-9C6B-D6C7DFDC589F}" vid="{4A3C46E8-61CC-4603-A589-7422A47A8E4A}"/>
+    </a:ext>
+  </a:extLst>
+</a:theme>
 </file>